--- a/exercises/meta_learning/meta_learning_exercise.pptx
+++ b/exercises/meta_learning/meta_learning_exercise.pptx
@@ -414,7 +414,7 @@
             <a:fld id="{57AF82F7-3B33-6D48-9626-CABC5CBE1A55}" type="datetime1">
               <a:rPr lang="it-IT" altLang="x-none"/>
               <a:pPr/>
-              <a:t>29/06/25</a:t>
+              <a:t>11/06/26</a:t>
             </a:fld>
             <a:endParaRPr lang="it-IT" altLang="x-none"/>
           </a:p>
@@ -5221,8 +5221,8 @@
           </a:p>
         </p:txBody>
       </p:sp>
-      <mc:AlternateContent xmlns:mc="http://schemas.openxmlformats.org/markup-compatibility/2006" xmlns:a14="http://schemas.microsoft.com/office/drawing/2010/main">
-        <mc:Choice Requires="a14">
+      <mc:AlternateContent xmlns:mc="http://schemas.openxmlformats.org/markup-compatibility/2006">
+        <mc:Choice xmlns:a14="http://schemas.microsoft.com/office/drawing/2010/main" Requires="a14">
           <p:sp>
             <p:nvSpPr>
               <p:cNvPr id="6" name="Content Placeholder 5">
@@ -5269,7 +5269,15 @@
                 </a:pPr>
                 <a:r>
                   <a:rPr lang="en-CH" dirty="0"/>
-                  <a:t>      DeepSet is invariant to permutations to the </a:t>
+                  <a:t>      DeepSets is </a:t>
+                </a:r>
+                <a:r>
+                  <a:rPr lang="en-CH" i="1" dirty="0"/>
+                  <a:t>invariant to permutations</a:t>
+                </a:r>
+                <a:r>
+                  <a:rPr lang="en-CH" dirty="0"/>
+                  <a:t> of the </a:t>
                 </a:r>
                 <a14:m>
                   <m:oMath xmlns:m="http://schemas.openxmlformats.org/officeDocument/2006/math">
@@ -5306,7 +5314,7 @@
             </p:txBody>
           </p:sp>
         </mc:Choice>
-        <mc:Fallback xmlns="">
+        <mc:Fallback>
           <p:sp>
             <p:nvSpPr>
               <p:cNvPr id="6" name="Content Placeholder 5">
@@ -5386,10 +5394,10 @@
       </p:pic>
       <p:pic>
         <p:nvPicPr>
-          <p:cNvPr id="9" name="Picture 8" descr="\documentclass{article}&#10;\usepackage{amsmath}&#10;\usepackage{amsfonts}&#10;\usepackage{color}&#10;\newcommand{\red}[1]{{\color{red}#1}}&#10;&#10;\pagestyle{empty}&#10;&#10;\begin{document}&#10;&#10;&#10;\begin{align*}&#10;c &amp;= \mathrm{DeepSet}_{\phi_1}(D) \\&#10;\hat y &amp;= \mathrm{MLP}_{\phi_2}(c, x).&#10;\end{align*}&#10;\end{document}" title="IguanaTex Bitmap Display">
+          <p:cNvPr id="4" name="Picture 3">
             <a:extLst>
               <a:ext uri="{FF2B5EF4-FFF2-40B4-BE49-F238E27FC236}">
-                <a16:creationId xmlns:a16="http://schemas.microsoft.com/office/drawing/2014/main" id="{4F62ABE8-ECFA-1CBA-5F55-F2722D026A99}"/>
+                <a16:creationId xmlns:a16="http://schemas.microsoft.com/office/drawing/2014/main" id="{532CF28D-EF3C-E6E5-9842-C3E420B7B573}"/>
               </a:ext>
             </a:extLst>
           </p:cNvPr>
@@ -5410,8 +5418,8 @@
         </p:blipFill>
         <p:spPr>
           <a:xfrm>
-            <a:off x="839416" y="2420888"/>
-            <a:ext cx="1805940" cy="617220"/>
+            <a:off x="839417" y="2420887"/>
+            <a:ext cx="1885493" cy="607162"/>
           </a:xfrm>
           <a:prstGeom prst="rect">
             <a:avLst/>
@@ -7581,7 +7589,7 @@
           <a:p>
             <a:r>
               <a:rPr lang="en-CH" dirty="0"/>
-              <a:t>Implementation of the in-context learning architecture for static regression DeepSet + MLP is sketched in in_context_learning_sketch.ipynb</a:t>
+              <a:t>Implementation of the in-context learning architecture for static regression DeepSets + MLP is sketched in in_context_learning_sketch.ipynb</a:t>
             </a:r>
           </a:p>
           <a:p>
@@ -7607,17 +7615,12 @@
             </a:r>
             <a:r>
               <a:rPr lang="en-GB" dirty="0"/>
-              <a:t>, described </a:t>
+              <a:t>, described in the </a:t>
             </a:r>
             <a:r>
-              <a:rPr lang="en-GB"/>
-              <a:t>in the </a:t>
-            </a:r>
-            <a:r>
-              <a:rPr lang="en-CH"/>
+              <a:rPr lang="en-CH" dirty="0"/>
               <a:t>next slides…)</a:t>
             </a:r>
-            <a:endParaRPr lang="en-CH" dirty="0"/>
           </a:p>
           <a:p>
             <a:pPr marL="0" indent="0">
@@ -7920,10 +7923,10 @@
       </mc:AlternateContent>
       <p:pic>
         <p:nvPicPr>
-          <p:cNvPr id="3" name="Picture 2" descr="\documentclass{article}&#10;\usepackage{amsmath}&#10;\usepackage{amsfonts}&#10;\usepackage{color}&#10;\newcommand{\red}[1]{{\color{red}#1}}&#10;&#10;\pagestyle{empty}&#10;&#10;\begin{document}&#10;&#10;&#10;\begin{align*}&#10;\theta &amp;= \mathrm{DeepSet}_\phi(D) \\&#10;\hat y &amp;= \mathrm{MLP}_\theta(x).&#10;\end{align*}&#10;\end{document}" title="IguanaTex Bitmap Display">
+          <p:cNvPr id="4" name="Picture 3">
             <a:extLst>
               <a:ext uri="{FF2B5EF4-FFF2-40B4-BE49-F238E27FC236}">
-                <a16:creationId xmlns:a16="http://schemas.microsoft.com/office/drawing/2014/main" id="{E23B0DC5-0F7E-FCFE-8980-405F6C7C36D5}"/>
+                <a16:creationId xmlns:a16="http://schemas.microsoft.com/office/drawing/2014/main" id="{F8C49D1E-45C0-96D5-A5DC-3EBC9E54FE50}"/>
               </a:ext>
             </a:extLst>
           </p:cNvPr>
@@ -7945,7 +7948,7 @@
         <p:spPr>
           <a:xfrm>
             <a:off x="839416" y="2420888"/>
-            <a:ext cx="1714500" cy="594360"/>
+            <a:ext cx="1795882" cy="598018"/>
           </a:xfrm>
           <a:prstGeom prst="rect">
             <a:avLst/>
@@ -9703,19 +9706,21 @@
 
 <file path=ppt/tags/tag21.xml><?xml version="1.0" encoding="utf-8"?>
 <p:tagLst xmlns:a="http://schemas.openxmlformats.org/drawingml/2006/main" xmlns:r="http://schemas.openxmlformats.org/officeDocument/2006/relationships" xmlns:p="http://schemas.openxmlformats.org/presentationml/2006/main">
-  <p:tag name="OUTPUTDPI" val="1200"/>
-  <p:tag name="ORIGINALHEIGHT" val="26"/>
-  <p:tag name="ORIGINALWIDTH" val="75"/>
-  <p:tag name="OUTPUTTYPE" val="PDF"/>
-  <p:tag name="IGUANATEXVERSION" val="160"/>
-  <p:tag name="LATEXADDIN" val="\documentclass{article}&#10;\usepackage{amsmath}&#10;\usepackage{amsfonts}&#10;\usepackage{color}&#10;\newcommand{\red}[1]{{\color{red}#1}}&#10;&#10;\pagestyle{empty}&#10;&#10;\begin{document}&#10;&#10;&#10;\begin{align*}&#10;\theta &amp;= \mathrm{DeepSet}_\phi(D) \\&#10;\hat y &amp;= \mathrm{MLP}_\theta(x).&#10;\end{align*}&#10;\end{document}"/>
+  <p:tag name="OUTPUTDPI" val=" 1200"/>
+  <p:tag name="ORIGINALHEIGHT" val=" 327"/>
+  <p:tag name="ORIGINALWIDTH" val=" 982"/>
+  <p:tag name="OUTPUTTYPE" val="PNG"/>
+  <p:tag name="IGUANATEXVERSION" val="162"/>
+  <p:tag name="LATEXADDIN" val="\documentclass{article}&#10;\usepackage{amsmath}&#10;\usepackage{amsfonts}&#10;\usepackage{color}&#10;\newcommand{\red}[1]{{\color{red}#1}}&#10;&#10;\pagestyle{empty}&#10;&#10;\begin{document}&#10;&#10;&#10;\begin{align*}&#10;\theta &amp;= \mathrm{DeepSets}_\phi(D) \\&#10;\hat y &amp;= \mathrm{MLP}_\theta(x).&#10;\end{align*}&#10;\end{document}"/>
   <p:tag name="IGUANATEXSIZE" val="18"/>
-  <p:tag name="IGUANATEXCURSOR" val="245"/>
+  <p:tag name="IGUANATEXCURSOR" val="204"/>
   <p:tag name="TRANSPARENCY" val="True"/>
+  <p:tag name="CHOOSECOLOR" val="False"/>
+  <p:tag name="COLORHEX" val="000000"/>
   <p:tag name="LATEXENGINEID" val="0"/>
   <p:tag name="TEMPFOLDER" val="/Users/marco.forgione/Library/Containers/com.microsoft.Powerpoint/Data/tmp/TemporaryItems/"/>
-  <p:tag name="LATEXFORMHEIGHT" val="426.65"/>
-  <p:tag name="LATEXFORMWIDTH" val="513.35"/>
+  <p:tag name="LATEXFORMHEIGHT" val=" 426.65"/>
+  <p:tag name="LATEXFORMWIDTH" val=" 513.35"/>
   <p:tag name="LATEXFORMWRAP" val="True"/>
   <p:tag name="BITMAPVECTOR" val="0"/>
 </p:tagLst>
@@ -10063,19 +10068,21 @@
 
 <file path=ppt/tags/tag8.xml><?xml version="1.0" encoding="utf-8"?>
 <p:tagLst xmlns:a="http://schemas.openxmlformats.org/drawingml/2006/main" xmlns:r="http://schemas.openxmlformats.org/officeDocument/2006/relationships" xmlns:p="http://schemas.openxmlformats.org/presentationml/2006/main">
-  <p:tag name="OUTPUTDPI" val="1200"/>
-  <p:tag name="ORIGINALHEIGHT" val="27"/>
-  <p:tag name="ORIGINALWIDTH" val="79"/>
-  <p:tag name="OUTPUTTYPE" val="PDF"/>
-  <p:tag name="IGUANATEXVERSION" val="160"/>
-  <p:tag name="LATEXADDIN" val="\documentclass{article}&#10;\usepackage{amsmath}&#10;\usepackage{amsfonts}&#10;\usepackage{color}&#10;\newcommand{\red}[1]{{\color{red}#1}}&#10;&#10;\pagestyle{empty}&#10;&#10;\begin{document}&#10;&#10;&#10;\begin{align*}&#10;c &amp;= \mathrm{DeepSet}_{\phi_1}(D) \\&#10;\hat y &amp;= \mathrm{MLP}_{\phi_2}(c, x).&#10;\end{align*}&#10;\end{document}"/>
+  <p:tag name="OUTPUTDPI" val=" 1200"/>
+  <p:tag name="ORIGINALHEIGHT" val=" 332"/>
+  <p:tag name="ORIGINALWIDTH" val=" 1031"/>
+  <p:tag name="OUTPUTTYPE" val="PNG"/>
+  <p:tag name="IGUANATEXVERSION" val="162"/>
+  <p:tag name="LATEXADDIN" val="\documentclass{article}&#10;\usepackage{amsmath}&#10;\usepackage{amsfonts}&#10;\usepackage{color}&#10;\newcommand{\red}[1]{{\color{red}#1}}&#10;&#10;\pagestyle{empty}&#10;&#10;\begin{document}&#10;&#10;&#10;\begin{align*}&#10;c &amp;= \mathrm{DeepSets}_{\phi_1}(D) \\&#10;\hat y &amp;= \mathrm{MLP}_{\phi_2}(c, x).&#10;\end{align*}&#10;\end{document}"/>
   <p:tag name="IGUANATEXSIZE" val="18"/>
-  <p:tag name="IGUANATEXCURSOR" val="245"/>
+  <p:tag name="IGUANATEXCURSOR" val="199"/>
   <p:tag name="TRANSPARENCY" val="True"/>
+  <p:tag name="CHOOSECOLOR" val="False"/>
+  <p:tag name="COLORHEX" val="000000"/>
   <p:tag name="LATEXENGINEID" val="0"/>
   <p:tag name="TEMPFOLDER" val="/Users/marco.forgione/Library/Containers/com.microsoft.Powerpoint/Data/tmp/TemporaryItems/"/>
-  <p:tag name="LATEXFORMHEIGHT" val="426.65"/>
-  <p:tag name="LATEXFORMWIDTH" val="513.35"/>
+  <p:tag name="LATEXFORMHEIGHT" val=" 426.65"/>
+  <p:tag name="LATEXFORMWIDTH" val=" 513.35"/>
   <p:tag name="LATEXFORMWRAP" val="True"/>
   <p:tag name="BITMAPVECTOR" val="0"/>
 </p:tagLst>
@@ -11519,6 +11526,26 @@
 </file>
 
 <file path=customXml/item1.xml><?xml version="1.0" encoding="utf-8"?>
+<p:properties xmlns:p="http://schemas.microsoft.com/office/2006/metadata/properties" xmlns:xsi="http://www.w3.org/2001/XMLSchema-instance" xmlns:pc="http://schemas.microsoft.com/office/infopath/2007/PartnerControls">
+  <documentManagement>
+    <lcf76f155ced4ddcb4097134ff3c332f xmlns="0c05fedb-ed2a-4eb3-93de-5f5a6c97bfe0">
+      <Terms xmlns="http://schemas.microsoft.com/office/infopath/2007/PartnerControls"/>
+    </lcf76f155ced4ddcb4097134ff3c332f>
+    <TaxCatchAll xmlns="c69d801c-64cd-49bc-b1b3-ec2496ede094" xsi:nil="true"/>
+  </documentManagement>
+</p:properties>
+</file>
+
+<file path=customXml/item2.xml><?xml version="1.0" encoding="utf-8"?>
+<?mso-contentType ?>
+<FormTemplates xmlns="http://schemas.microsoft.com/sharepoint/v3/contenttype/forms">
+  <Display>DocumentLibraryForm</Display>
+  <Edit>DocumentLibraryForm</Edit>
+  <New>DocumentLibraryForm</New>
+</FormTemplates>
+</file>
+
+<file path=customXml/item3.xml><?xml version="1.0" encoding="utf-8"?>
 <ct:contentTypeSchema xmlns:ct="http://schemas.microsoft.com/office/2006/metadata/contentType" xmlns:ma="http://schemas.microsoft.com/office/2006/metadata/properties/metaAttributes" ct:_="" ma:_="" ma:contentTypeName="Document" ma:contentTypeID="0x010100E943B4D0C91CA54E9BBFAD215D4A4FF7" ma:contentTypeVersion="18" ma:contentTypeDescription="Create a new document." ma:contentTypeScope="" ma:versionID="48c4930ddcec7bff74490998dd84a4c1">
   <xsd:schema xmlns:xsd="http://www.w3.org/2001/XMLSchema" xmlns:xs="http://www.w3.org/2001/XMLSchema" xmlns:p="http://schemas.microsoft.com/office/2006/metadata/properties" xmlns:ns2="0c05fedb-ed2a-4eb3-93de-5f5a6c97bfe0" xmlns:ns3="c69d801c-64cd-49bc-b1b3-ec2496ede094" targetNamespace="http://schemas.microsoft.com/office/2006/metadata/properties" ma:root="true" ma:fieldsID="dcb337392c8a5973c5e221652a72fbb4" ns2:_="" ns3:_="">
     <xsd:import namespace="0c05fedb-ed2a-4eb3-93de-5f5a6c97bfe0"/>
@@ -11773,27 +11800,32 @@
 </ct:contentTypeSchema>
 </file>
 
-<file path=customXml/item2.xml><?xml version="1.0" encoding="utf-8"?>
-<p:properties xmlns:p="http://schemas.microsoft.com/office/2006/metadata/properties" xmlns:xsi="http://www.w3.org/2001/XMLSchema-instance" xmlns:pc="http://schemas.microsoft.com/office/infopath/2007/PartnerControls">
-  <documentManagement>
-    <lcf76f155ced4ddcb4097134ff3c332f xmlns="0c05fedb-ed2a-4eb3-93de-5f5a6c97bfe0">
-      <Terms xmlns="http://schemas.microsoft.com/office/infopath/2007/PartnerControls"/>
-    </lcf76f155ced4ddcb4097134ff3c332f>
-    <TaxCatchAll xmlns="c69d801c-64cd-49bc-b1b3-ec2496ede094" xsi:nil="true"/>
-  </documentManagement>
-</p:properties>
+<file path=customXml/itemProps1.xml><?xml version="1.0" encoding="utf-8"?>
+<ds:datastoreItem xmlns:ds="http://schemas.openxmlformats.org/officeDocument/2006/customXml" ds:itemID="{862A9E72-43F2-4CCE-8F90-EBA4919DBB42}">
+  <ds:schemaRefs>
+    <ds:schemaRef ds:uri="http://schemas.microsoft.com/office/2006/documentManagement/types"/>
+    <ds:schemaRef ds:uri="c69d801c-64cd-49bc-b1b3-ec2496ede094"/>
+    <ds:schemaRef ds:uri="http://purl.org/dc/dcmitype/"/>
+    <ds:schemaRef ds:uri="http://purl.org/dc/elements/1.1/"/>
+    <ds:schemaRef ds:uri="http://schemas.openxmlformats.org/package/2006/metadata/core-properties"/>
+    <ds:schemaRef ds:uri="http://purl.org/dc/terms/"/>
+    <ds:schemaRef ds:uri="http://www.w3.org/XML/1998/namespace"/>
+    <ds:schemaRef ds:uri="http://schemas.microsoft.com/office/infopath/2007/PartnerControls"/>
+    <ds:schemaRef ds:uri="0c05fedb-ed2a-4eb3-93de-5f5a6c97bfe0"/>
+    <ds:schemaRef ds:uri="http://schemas.microsoft.com/office/2006/metadata/properties"/>
+  </ds:schemaRefs>
+</ds:datastoreItem>
 </file>
 
-<file path=customXml/item3.xml><?xml version="1.0" encoding="utf-8"?>
-<?mso-contentType ?>
-<FormTemplates xmlns="http://schemas.microsoft.com/sharepoint/v3/contenttype/forms">
-  <Display>DocumentLibraryForm</Display>
-  <Edit>DocumentLibraryForm</Edit>
-  <New>DocumentLibraryForm</New>
-</FormTemplates>
+<file path=customXml/itemProps2.xml><?xml version="1.0" encoding="utf-8"?>
+<ds:datastoreItem xmlns:ds="http://schemas.openxmlformats.org/officeDocument/2006/customXml" ds:itemID="{957E0BBE-38AF-4179-B401-F6E82B6A5F3D}">
+  <ds:schemaRefs>
+    <ds:schemaRef ds:uri="http://schemas.microsoft.com/sharepoint/v3/contenttype/forms"/>
+  </ds:schemaRefs>
+</ds:datastoreItem>
 </file>
 
-<file path=customXml/itemProps1.xml><?xml version="1.0" encoding="utf-8"?>
+<file path=customXml/itemProps3.xml><?xml version="1.0" encoding="utf-8"?>
 <ds:datastoreItem xmlns:ds="http://schemas.openxmlformats.org/officeDocument/2006/customXml" ds:itemID="{950C4CF8-8E6C-4481-8DE0-79509E1800D4}">
   <ds:schemaRefs>
     <ds:schemaRef ds:uri="http://schemas.microsoft.com/office/2006/metadata/contentType"/>
@@ -11810,29 +11842,4 @@
     <ds:schemaRef ds:uri="http://schemas.microsoft.com/internal/obd"/>
   </ds:schemaRefs>
 </ds:datastoreItem>
-</file>
-
-<file path=customXml/itemProps2.xml><?xml version="1.0" encoding="utf-8"?>
-<ds:datastoreItem xmlns:ds="http://schemas.openxmlformats.org/officeDocument/2006/customXml" ds:itemID="{862A9E72-43F2-4CCE-8F90-EBA4919DBB42}">
-  <ds:schemaRefs>
-    <ds:schemaRef ds:uri="http://schemas.microsoft.com/office/2006/documentManagement/types"/>
-    <ds:schemaRef ds:uri="c69d801c-64cd-49bc-b1b3-ec2496ede094"/>
-    <ds:schemaRef ds:uri="http://purl.org/dc/dcmitype/"/>
-    <ds:schemaRef ds:uri="http://purl.org/dc/elements/1.1/"/>
-    <ds:schemaRef ds:uri="http://schemas.openxmlformats.org/package/2006/metadata/core-properties"/>
-    <ds:schemaRef ds:uri="http://purl.org/dc/terms/"/>
-    <ds:schemaRef ds:uri="http://www.w3.org/XML/1998/namespace"/>
-    <ds:schemaRef ds:uri="http://schemas.microsoft.com/office/infopath/2007/PartnerControls"/>
-    <ds:schemaRef ds:uri="0c05fedb-ed2a-4eb3-93de-5f5a6c97bfe0"/>
-    <ds:schemaRef ds:uri="http://schemas.microsoft.com/office/2006/metadata/properties"/>
-  </ds:schemaRefs>
-</ds:datastoreItem>
-</file>
-
-<file path=customXml/itemProps3.xml><?xml version="1.0" encoding="utf-8"?>
-<ds:datastoreItem xmlns:ds="http://schemas.openxmlformats.org/officeDocument/2006/customXml" ds:itemID="{957E0BBE-38AF-4179-B401-F6E82B6A5F3D}">
-  <ds:schemaRefs>
-    <ds:schemaRef ds:uri="http://schemas.microsoft.com/sharepoint/v3/contenttype/forms"/>
-  </ds:schemaRefs>
-</ds:datastoreItem>
 </file>
--- a/exercises/meta_learning/meta_learning_exercise.pptx
+++ b/exercises/meta_learning/meta_learning_exercise.pptx
@@ -5,10 +5,10 @@
     <p:sldMasterId id="2147483649" r:id="rId4"/>
   </p:sldMasterIdLst>
   <p:notesMasterIdLst>
-    <p:notesMasterId r:id="rId15"/>
+    <p:notesMasterId r:id="rId16"/>
   </p:notesMasterIdLst>
   <p:handoutMasterIdLst>
-    <p:handoutMasterId r:id="rId16"/>
+    <p:handoutMasterId r:id="rId17"/>
   </p:handoutMasterIdLst>
   <p:sldIdLst>
     <p:sldId id="293" r:id="rId5"/>
@@ -21,6 +21,7 @@
     <p:sldId id="271" r:id="rId12"/>
     <p:sldId id="267" r:id="rId13"/>
     <p:sldId id="269" r:id="rId14"/>
+    <p:sldId id="6366" r:id="rId15"/>
   </p:sldIdLst>
   <p:sldSz cx="12192000" cy="6858000"/>
   <p:notesSz cx="6858000" cy="9144000"/>
@@ -414,7 +415,7 @@
             <a:fld id="{57AF82F7-3B33-6D48-9626-CABC5CBE1A55}" type="datetime1">
               <a:rPr lang="it-IT" altLang="x-none"/>
               <a:pPr/>
-              <a:t>11/06/26</a:t>
+              <a:t>19/06/26</a:t>
             </a:fld>
             <a:endParaRPr lang="it-IT" altLang="x-none"/>
           </a:p>
@@ -1083,6 +1084,131 @@
 </p:notes>
 </file>
 
+<file path=ppt/notesSlides/notesSlide2.xml><?xml version="1.0" encoding="utf-8"?>
+<p:notes xmlns:a="http://schemas.openxmlformats.org/drawingml/2006/main" xmlns:r="http://schemas.openxmlformats.org/officeDocument/2006/relationships" xmlns:p="http://schemas.openxmlformats.org/presentationml/2006/main">
+  <p:cSld>
+    <p:spTree>
+      <p:nvGrpSpPr>
+        <p:cNvPr id="1" name="">
+          <a:extLst>
+            <a:ext uri="{FF2B5EF4-FFF2-40B4-BE49-F238E27FC236}">
+              <a16:creationId xmlns:a16="http://schemas.microsoft.com/office/drawing/2014/main" id="{B92402C0-1999-BB3A-8CB0-1D6BA1F9C45C}"/>
+            </a:ext>
+          </a:extLst>
+        </p:cNvPr>
+        <p:cNvGrpSpPr/>
+        <p:nvPr/>
+      </p:nvGrpSpPr>
+      <p:grpSpPr>
+        <a:xfrm>
+          <a:off x="0" y="0"/>
+          <a:ext cx="0" cy="0"/>
+          <a:chOff x="0" y="0"/>
+          <a:chExt cx="0" cy="0"/>
+        </a:xfrm>
+      </p:grpSpPr>
+      <p:sp>
+        <p:nvSpPr>
+          <p:cNvPr id="2" name="Segnaposto immagine diapositiva 1">
+            <a:extLst>
+              <a:ext uri="{FF2B5EF4-FFF2-40B4-BE49-F238E27FC236}">
+                <a16:creationId xmlns:a16="http://schemas.microsoft.com/office/drawing/2014/main" id="{53B7A043-BAB7-C02A-7F5F-25FD2A8C0DD7}"/>
+              </a:ext>
+            </a:extLst>
+          </p:cNvPr>
+          <p:cNvSpPr>
+            <a:spLocks noGrp="1" noRot="1" noChangeAspect="1"/>
+          </p:cNvSpPr>
+          <p:nvPr>
+            <p:ph type="sldImg"/>
+          </p:nvPr>
+        </p:nvSpPr>
+        <p:spPr/>
+      </p:sp>
+      <p:sp>
+        <p:nvSpPr>
+          <p:cNvPr id="3" name="Segnaposto note 2">
+            <a:extLst>
+              <a:ext uri="{FF2B5EF4-FFF2-40B4-BE49-F238E27FC236}">
+                <a16:creationId xmlns:a16="http://schemas.microsoft.com/office/drawing/2014/main" id="{4658F1CE-72AC-9CA3-B507-4A13D725B97F}"/>
+              </a:ext>
+            </a:extLst>
+          </p:cNvPr>
+          <p:cNvSpPr>
+            <a:spLocks noGrp="1"/>
+          </p:cNvSpPr>
+          <p:nvPr>
+            <p:ph type="body" idx="1"/>
+          </p:nvPr>
+        </p:nvSpPr>
+        <p:spPr/>
+        <p:txBody>
+          <a:bodyPr/>
+          <a:lstStyle/>
+          <a:p>
+            <a:pPr marL="0" marR="0" lvl="0" indent="0" algn="l" defTabSz="914400" rtl="0" eaLnBrk="1" fontAlgn="auto" latinLnBrk="0" hangingPunct="1">
+              <a:lnSpc>
+                <a:spcPct val="100000"/>
+              </a:lnSpc>
+              <a:spcBef>
+                <a:spcPts val="0"/>
+              </a:spcBef>
+              <a:spcAft>
+                <a:spcPts val="0"/>
+              </a:spcAft>
+              <a:buClrTx/>
+              <a:buSzTx/>
+              <a:buFontTx/>
+              <a:buNone/>
+              <a:tabLst/>
+              <a:defRPr/>
+            </a:pPr>
+            <a:endParaRPr lang="it-CH" dirty="0"/>
+          </a:p>
+        </p:txBody>
+      </p:sp>
+      <p:sp>
+        <p:nvSpPr>
+          <p:cNvPr id="4" name="Segnaposto numero diapositiva 3">
+            <a:extLst>
+              <a:ext uri="{FF2B5EF4-FFF2-40B4-BE49-F238E27FC236}">
+                <a16:creationId xmlns:a16="http://schemas.microsoft.com/office/drawing/2014/main" id="{9A1C3043-8C15-E462-4BD4-F566BC46E340}"/>
+              </a:ext>
+            </a:extLst>
+          </p:cNvPr>
+          <p:cNvSpPr>
+            <a:spLocks noGrp="1"/>
+          </p:cNvSpPr>
+          <p:nvPr>
+            <p:ph type="sldNum" sz="quarter" idx="5"/>
+          </p:nvPr>
+        </p:nvSpPr>
+        <p:spPr/>
+        <p:txBody>
+          <a:bodyPr/>
+          <a:lstStyle/>
+          <a:p>
+            <a:fld id="{B6A6F0FA-31D0-AB4D-9BAD-FF9E467B93C7}" type="slidenum">
+              <a:rPr lang="it-CH" smtClean="0"/>
+              <a:t>11</a:t>
+            </a:fld>
+            <a:endParaRPr lang="it-CH"/>
+          </a:p>
+        </p:txBody>
+      </p:sp>
+    </p:spTree>
+    <p:extLst>
+      <p:ext uri="{BB962C8B-B14F-4D97-AF65-F5344CB8AC3E}">
+        <p14:creationId xmlns:p14="http://schemas.microsoft.com/office/powerpoint/2010/main" val="3351282450"/>
+      </p:ext>
+    </p:extLst>
+  </p:cSld>
+  <p:clrMapOvr>
+    <a:masterClrMapping/>
+  </p:clrMapOvr>
+</p:notes>
+</file>
+
 <file path=ppt/slideLayouts/slideLayout1.xml><?xml version="1.0" encoding="utf-8"?>
 <p:sldLayout xmlns:a="http://schemas.openxmlformats.org/drawingml/2006/main" xmlns:r="http://schemas.openxmlformats.org/officeDocument/2006/relationships" xmlns:p="http://schemas.openxmlformats.org/presentationml/2006/main" preserve="1" userDrawn="1">
   <p:cSld name="Diapositiva titolo">
@@ -2446,6 +2572,228 @@
 </p:sldLayout>
 </file>
 
+<file path=ppt/slideLayouts/slideLayout9.xml><?xml version="1.0" encoding="utf-8"?>
+<p:sldLayout xmlns:a="http://schemas.openxmlformats.org/drawingml/2006/main" xmlns:r="http://schemas.openxmlformats.org/officeDocument/2006/relationships" xmlns:p="http://schemas.openxmlformats.org/presentationml/2006/main" type="title">
+  <p:cSld name="1_Diapositiva titolo">
+    <p:spTree>
+      <p:nvGrpSpPr>
+        <p:cNvPr id="1" name=""/>
+        <p:cNvGrpSpPr/>
+        <p:nvPr/>
+      </p:nvGrpSpPr>
+      <p:grpSpPr>
+        <a:xfrm>
+          <a:off x="0" y="0"/>
+          <a:ext cx="0" cy="0"/>
+          <a:chOff x="0" y="0"/>
+          <a:chExt cx="0" cy="0"/>
+        </a:xfrm>
+      </p:grpSpPr>
+      <p:sp>
+        <p:nvSpPr>
+          <p:cNvPr id="2" name="Titolo 1">
+            <a:extLst>
+              <a:ext uri="{FF2B5EF4-FFF2-40B4-BE49-F238E27FC236}">
+                <a16:creationId xmlns:a16="http://schemas.microsoft.com/office/drawing/2014/main" id="{6F20B484-5030-D323-3799-18FA1EE76387}"/>
+              </a:ext>
+            </a:extLst>
+          </p:cNvPr>
+          <p:cNvSpPr>
+            <a:spLocks noGrp="1"/>
+          </p:cNvSpPr>
+          <p:nvPr>
+            <p:ph type="ctrTitle"/>
+          </p:nvPr>
+        </p:nvSpPr>
+        <p:spPr>
+          <a:xfrm>
+            <a:off x="1524000" y="1122363"/>
+            <a:ext cx="9144000" cy="2387600"/>
+          </a:xfrm>
+        </p:spPr>
+        <p:txBody>
+          <a:bodyPr anchor="b"/>
+          <a:lstStyle>
+            <a:lvl1pPr algn="ctr">
+              <a:defRPr sz="6000"/>
+            </a:lvl1pPr>
+          </a:lstStyle>
+          <a:p>
+            <a:r>
+              <a:rPr lang="it-IT"/>
+              <a:t>Fare clic per modificare lo stile del titolo dello schema</a:t>
+            </a:r>
+            <a:endParaRPr lang="it-CH"/>
+          </a:p>
+        </p:txBody>
+      </p:sp>
+      <p:sp>
+        <p:nvSpPr>
+          <p:cNvPr id="3" name="Sottotitolo 2">
+            <a:extLst>
+              <a:ext uri="{FF2B5EF4-FFF2-40B4-BE49-F238E27FC236}">
+                <a16:creationId xmlns:a16="http://schemas.microsoft.com/office/drawing/2014/main" id="{99F607B8-D98E-2C2D-FD15-3E6921D6C4BA}"/>
+              </a:ext>
+            </a:extLst>
+          </p:cNvPr>
+          <p:cNvSpPr>
+            <a:spLocks noGrp="1"/>
+          </p:cNvSpPr>
+          <p:nvPr>
+            <p:ph type="subTitle" idx="1"/>
+          </p:nvPr>
+        </p:nvSpPr>
+        <p:spPr>
+          <a:xfrm>
+            <a:off x="1524000" y="3602038"/>
+            <a:ext cx="9144000" cy="1655762"/>
+          </a:xfrm>
+        </p:spPr>
+        <p:txBody>
+          <a:bodyPr/>
+          <a:lstStyle>
+            <a:lvl1pPr marL="0" indent="0" algn="ctr">
+              <a:buNone/>
+              <a:defRPr sz="2400"/>
+            </a:lvl1pPr>
+            <a:lvl2pPr marL="457200" indent="0" algn="ctr">
+              <a:buNone/>
+              <a:defRPr sz="2000"/>
+            </a:lvl2pPr>
+            <a:lvl3pPr marL="914400" indent="0" algn="ctr">
+              <a:buNone/>
+              <a:defRPr sz="1800"/>
+            </a:lvl3pPr>
+            <a:lvl4pPr marL="1371600" indent="0" algn="ctr">
+              <a:buNone/>
+              <a:defRPr sz="1600"/>
+            </a:lvl4pPr>
+            <a:lvl5pPr marL="1828800" indent="0" algn="ctr">
+              <a:buNone/>
+              <a:defRPr sz="1600"/>
+            </a:lvl5pPr>
+            <a:lvl6pPr marL="2286000" indent="0" algn="ctr">
+              <a:buNone/>
+              <a:defRPr sz="1600"/>
+            </a:lvl6pPr>
+            <a:lvl7pPr marL="2743200" indent="0" algn="ctr">
+              <a:buNone/>
+              <a:defRPr sz="1600"/>
+            </a:lvl7pPr>
+            <a:lvl8pPr marL="3200400" indent="0" algn="ctr">
+              <a:buNone/>
+              <a:defRPr sz="1600"/>
+            </a:lvl8pPr>
+            <a:lvl9pPr marL="3657600" indent="0" algn="ctr">
+              <a:buNone/>
+              <a:defRPr sz="1600"/>
+            </a:lvl9pPr>
+          </a:lstStyle>
+          <a:p>
+            <a:r>
+              <a:rPr lang="it-IT"/>
+              <a:t>Fare clic per modificare lo stile del sottotitolo dello schema</a:t>
+            </a:r>
+            <a:endParaRPr lang="it-CH"/>
+          </a:p>
+        </p:txBody>
+      </p:sp>
+      <p:sp>
+        <p:nvSpPr>
+          <p:cNvPr id="4" name="Segnaposto data 3">
+            <a:extLst>
+              <a:ext uri="{FF2B5EF4-FFF2-40B4-BE49-F238E27FC236}">
+                <a16:creationId xmlns:a16="http://schemas.microsoft.com/office/drawing/2014/main" id="{FE2C49ED-4AE3-3ABD-9CB8-D661A60309E0}"/>
+              </a:ext>
+            </a:extLst>
+          </p:cNvPr>
+          <p:cNvSpPr>
+            <a:spLocks noGrp="1"/>
+          </p:cNvSpPr>
+          <p:nvPr>
+            <p:ph type="dt" sz="half" idx="10"/>
+          </p:nvPr>
+        </p:nvSpPr>
+        <p:spPr/>
+        <p:txBody>
+          <a:bodyPr/>
+          <a:lstStyle/>
+          <a:p>
+            <a:fld id="{2A147C38-CC24-4E9D-9FE1-BE5105214113}" type="datetimeFigureOut">
+              <a:rPr lang="it-CH" smtClean="0"/>
+              <a:t>19.06.26</a:t>
+            </a:fld>
+            <a:endParaRPr lang="it-CH"/>
+          </a:p>
+        </p:txBody>
+      </p:sp>
+      <p:sp>
+        <p:nvSpPr>
+          <p:cNvPr id="5" name="Segnaposto piè di pagina 4">
+            <a:extLst>
+              <a:ext uri="{FF2B5EF4-FFF2-40B4-BE49-F238E27FC236}">
+                <a16:creationId xmlns:a16="http://schemas.microsoft.com/office/drawing/2014/main" id="{CA1FB008-ACE7-DA06-5DBF-8A80944062A5}"/>
+              </a:ext>
+            </a:extLst>
+          </p:cNvPr>
+          <p:cNvSpPr>
+            <a:spLocks noGrp="1"/>
+          </p:cNvSpPr>
+          <p:nvPr>
+            <p:ph type="ftr" sz="quarter" idx="11"/>
+          </p:nvPr>
+        </p:nvSpPr>
+        <p:spPr/>
+        <p:txBody>
+          <a:bodyPr/>
+          <a:lstStyle/>
+          <a:p>
+            <a:endParaRPr lang="it-CH"/>
+          </a:p>
+        </p:txBody>
+      </p:sp>
+      <p:sp>
+        <p:nvSpPr>
+          <p:cNvPr id="6" name="Segnaposto numero diapositiva 5">
+            <a:extLst>
+              <a:ext uri="{FF2B5EF4-FFF2-40B4-BE49-F238E27FC236}">
+                <a16:creationId xmlns:a16="http://schemas.microsoft.com/office/drawing/2014/main" id="{94AAF54B-A0BB-172F-FFB5-76E038F2EF84}"/>
+              </a:ext>
+            </a:extLst>
+          </p:cNvPr>
+          <p:cNvSpPr>
+            <a:spLocks noGrp="1"/>
+          </p:cNvSpPr>
+          <p:nvPr>
+            <p:ph type="sldNum" sz="quarter" idx="12"/>
+          </p:nvPr>
+        </p:nvSpPr>
+        <p:spPr/>
+        <p:txBody>
+          <a:bodyPr/>
+          <a:lstStyle/>
+          <a:p>
+            <a:fld id="{9CFB99F6-FA2F-462D-8D42-99659AEDDEA3}" type="slidenum">
+              <a:rPr lang="it-CH" smtClean="0"/>
+              <a:t>‹#›</a:t>
+            </a:fld>
+            <a:endParaRPr lang="it-CH"/>
+          </a:p>
+        </p:txBody>
+      </p:sp>
+    </p:spTree>
+    <p:extLst>
+      <p:ext uri="{BB962C8B-B14F-4D97-AF65-F5344CB8AC3E}">
+        <p14:creationId xmlns:p14="http://schemas.microsoft.com/office/powerpoint/2010/main" val="1972685618"/>
+      </p:ext>
+    </p:extLst>
+  </p:cSld>
+  <p:clrMapOvr>
+    <a:masterClrMapping/>
+  </p:clrMapOvr>
+</p:sldLayout>
+</file>
+
 <file path=ppt/slideMasters/slideMaster1.xml><?xml version="1.0" encoding="utf-8"?>
 <p:sldMaster xmlns:a="http://schemas.openxmlformats.org/drawingml/2006/main" xmlns:r="http://schemas.openxmlformats.org/officeDocument/2006/relationships" xmlns:p="http://schemas.openxmlformats.org/presentationml/2006/main" preserve="1">
   <p:cSld>
@@ -2486,7 +2834,7 @@
           <p:nvPr userDrawn="1"/>
         </p:nvPicPr>
         <p:blipFill>
-          <a:blip r:embed="rId10"/>
+          <a:blip r:embed="rId11"/>
           <a:srcRect/>
           <a:stretch/>
         </p:blipFill>
@@ -2662,6 +3010,7 @@
     <p:sldLayoutId id="2147484144" r:id="rId6"/>
     <p:sldLayoutId id="2147484145" r:id="rId7"/>
     <p:sldLayoutId id="2147484146" r:id="rId8"/>
+    <p:sldLayoutId id="2147484148" r:id="rId9"/>
   </p:sldLayoutIdLst>
   <p:hf hdr="0" ftr="0"/>
   <p:txStyles>
@@ -3507,10 +3856,10 @@
       </p:sp>
       <p:pic>
         <p:nvPicPr>
-          <p:cNvPr id="4" name="Picture 3" descr="\documentclass{article}&#10;\usepackage{amsmath}&#10;\usepackage{amsfonts}&#10;\usepackage{color}&#10;\newcommand{\red}[1]{{\color{red}#1}}&#10;&#10;\pagestyle{empty}&#10;&#10;\begin{document}&#10;&#10;\begin{align*}&#10;\theta &amp;= \mathrm{Alg}_\theta(D) = \phi - \alpha \nabla_\theta \mathcal{L}(\theta, D), \\&#10;\hat y &amp;= \mathrm{MLP}_\phi(x).&#10;\end{align*}&#10;&#10;\end{document}" title="IguanaTex Bitmap Display">
+          <p:cNvPr id="9" name="Picture 8">
             <a:extLst>
               <a:ext uri="{FF2B5EF4-FFF2-40B4-BE49-F238E27FC236}">
-                <a16:creationId xmlns:a16="http://schemas.microsoft.com/office/drawing/2014/main" id="{061ED360-403D-52F4-7B11-BEDDDF083981}"/>
+                <a16:creationId xmlns:a16="http://schemas.microsoft.com/office/drawing/2014/main" id="{96F996D0-A284-1B89-C689-9D537DB2B1F6}"/>
               </a:ext>
             </a:extLst>
           </p:cNvPr>
@@ -3531,8 +3880,8 @@
         </p:blipFill>
         <p:spPr>
           <a:xfrm>
-            <a:off x="4151784" y="2584891"/>
-            <a:ext cx="3200400" cy="594360"/>
+            <a:off x="4151786" y="2584890"/>
+            <a:ext cx="3247949" cy="598018"/>
           </a:xfrm>
           <a:prstGeom prst="rect">
             <a:avLst/>
@@ -3649,6 +3998,472 @@
   <p:clrMapOvr>
     <a:masterClrMapping/>
   </p:clrMapOvr>
+</p:sld>
+</file>
+
+<file path=ppt/slides/slide11.xml><?xml version="1.0" encoding="utf-8"?>
+<p:sld xmlns:a="http://schemas.openxmlformats.org/drawingml/2006/main" xmlns:r="http://schemas.openxmlformats.org/officeDocument/2006/relationships" xmlns:p="http://schemas.openxmlformats.org/presentationml/2006/main" showMasterSp="0">
+  <p:cSld>
+    <p:bg>
+      <p:bgPr>
+        <a:solidFill>
+          <a:srgbClr val="EAEDF6"/>
+        </a:solidFill>
+        <a:effectLst/>
+      </p:bgPr>
+    </p:bg>
+    <p:spTree>
+      <p:nvGrpSpPr>
+        <p:cNvPr id="1" name="">
+          <a:extLst>
+            <a:ext uri="{FF2B5EF4-FFF2-40B4-BE49-F238E27FC236}">
+              <a16:creationId xmlns:a16="http://schemas.microsoft.com/office/drawing/2014/main" id="{C47DB652-7595-B799-5873-25401DBB83CF}"/>
+            </a:ext>
+          </a:extLst>
+        </p:cNvPr>
+        <p:cNvGrpSpPr/>
+        <p:nvPr/>
+      </p:nvGrpSpPr>
+      <p:grpSpPr>
+        <a:xfrm>
+          <a:off x="0" y="0"/>
+          <a:ext cx="0" cy="0"/>
+          <a:chOff x="0" y="0"/>
+          <a:chExt cx="0" cy="0"/>
+        </a:xfrm>
+      </p:grpSpPr>
+      <p:cxnSp>
+        <p:nvCxnSpPr>
+          <p:cNvPr id="19" name="Connettore 2 18">
+            <a:extLst>
+              <a:ext uri="{FF2B5EF4-FFF2-40B4-BE49-F238E27FC236}">
+                <a16:creationId xmlns:a16="http://schemas.microsoft.com/office/drawing/2014/main" id="{3A03B42E-59B0-DB35-9E58-BDC6A4EE9E86}"/>
+              </a:ext>
+            </a:extLst>
+          </p:cNvPr>
+          <p:cNvCxnSpPr/>
+          <p:nvPr/>
+        </p:nvCxnSpPr>
+        <p:spPr>
+          <a:xfrm flipV="1">
+            <a:off x="0" y="6610350"/>
+            <a:ext cx="12192000" cy="0"/>
+          </a:xfrm>
+          <a:prstGeom prst="straightConnector1">
+            <a:avLst/>
+          </a:prstGeom>
+          <a:ln>
+            <a:solidFill>
+              <a:schemeClr val="accent1">
+                <a:lumMod val="50000"/>
+              </a:schemeClr>
+            </a:solidFill>
+          </a:ln>
+        </p:spPr>
+        <p:style>
+          <a:lnRef idx="1">
+            <a:schemeClr val="accent1"/>
+          </a:lnRef>
+          <a:fillRef idx="0">
+            <a:schemeClr val="accent1"/>
+          </a:fillRef>
+          <a:effectRef idx="0">
+            <a:schemeClr val="accent1"/>
+          </a:effectRef>
+          <a:fontRef idx="minor">
+            <a:schemeClr val="tx1"/>
+          </a:fontRef>
+        </p:style>
+      </p:cxnSp>
+      <p:pic>
+        <p:nvPicPr>
+          <p:cNvPr id="14" name="Picture 13">
+            <a:extLst>
+              <a:ext uri="{FF2B5EF4-FFF2-40B4-BE49-F238E27FC236}">
+                <a16:creationId xmlns:a16="http://schemas.microsoft.com/office/drawing/2014/main" id="{EE94F8E9-3DA2-CC83-4E89-0AEAFC9EFAF4}"/>
+              </a:ext>
+            </a:extLst>
+          </p:cNvPr>
+          <p:cNvPicPr>
+            <a:picLocks noChangeAspect="1"/>
+          </p:cNvPicPr>
+          <p:nvPr/>
+        </p:nvPicPr>
+        <p:blipFill>
+          <a:blip r:embed="rId3">
+            <a:extLst>
+              <a:ext uri="{28A0092B-C50C-407E-A947-70E740481C1C}">
+                <a14:useLocalDpi xmlns:a14="http://schemas.microsoft.com/office/drawing/2010/main" val="0"/>
+              </a:ext>
+            </a:extLst>
+          </a:blip>
+          <a:stretch>
+            <a:fillRect/>
+          </a:stretch>
+        </p:blipFill>
+        <p:spPr>
+          <a:xfrm>
+            <a:off x="1" y="0"/>
+            <a:ext cx="9036424" cy="2332901"/>
+          </a:xfrm>
+          <a:prstGeom prst="rect">
+            <a:avLst/>
+          </a:prstGeom>
+        </p:spPr>
+      </p:pic>
+      <p:pic>
+        <p:nvPicPr>
+          <p:cNvPr id="20" name="Picture 19">
+            <a:extLst>
+              <a:ext uri="{FF2B5EF4-FFF2-40B4-BE49-F238E27FC236}">
+                <a16:creationId xmlns:a16="http://schemas.microsoft.com/office/drawing/2014/main" id="{E800F1C4-1F2A-5978-D0C3-C48C185F3BD5}"/>
+              </a:ext>
+            </a:extLst>
+          </p:cNvPr>
+          <p:cNvPicPr>
+            <a:picLocks noChangeAspect="1"/>
+          </p:cNvPicPr>
+          <p:nvPr/>
+        </p:nvPicPr>
+        <p:blipFill>
+          <a:blip r:embed="rId4"/>
+          <a:stretch>
+            <a:fillRect/>
+          </a:stretch>
+        </p:blipFill>
+        <p:spPr>
+          <a:xfrm>
+            <a:off x="8744131" y="85541"/>
+            <a:ext cx="3465788" cy="2551363"/>
+          </a:xfrm>
+          <a:prstGeom prst="rect">
+            <a:avLst/>
+          </a:prstGeom>
+        </p:spPr>
+      </p:pic>
+      <p:pic>
+        <p:nvPicPr>
+          <p:cNvPr id="21" name="Picture 20">
+            <a:extLst>
+              <a:ext uri="{FF2B5EF4-FFF2-40B4-BE49-F238E27FC236}">
+                <a16:creationId xmlns:a16="http://schemas.microsoft.com/office/drawing/2014/main" id="{21BCB797-85E4-CB38-94A7-BA4BC2E06A75}"/>
+              </a:ext>
+            </a:extLst>
+          </p:cNvPr>
+          <p:cNvPicPr>
+            <a:picLocks noChangeAspect="1"/>
+          </p:cNvPicPr>
+          <p:nvPr/>
+        </p:nvPicPr>
+        <p:blipFill>
+          <a:blip r:embed="rId5"/>
+          <a:stretch>
+            <a:fillRect/>
+          </a:stretch>
+        </p:blipFill>
+        <p:spPr>
+          <a:xfrm>
+            <a:off x="-1" y="2314307"/>
+            <a:ext cx="3296441" cy="2426696"/>
+          </a:xfrm>
+          <a:prstGeom prst="rect">
+            <a:avLst/>
+          </a:prstGeom>
+        </p:spPr>
+      </p:pic>
+      <p:sp>
+        <p:nvSpPr>
+          <p:cNvPr id="24" name="TextBox 23">
+            <a:extLst>
+              <a:ext uri="{FF2B5EF4-FFF2-40B4-BE49-F238E27FC236}">
+                <a16:creationId xmlns:a16="http://schemas.microsoft.com/office/drawing/2014/main" id="{6AA0A62E-65B3-9D0B-0446-79421770238C}"/>
+              </a:ext>
+            </a:extLst>
+          </p:cNvPr>
+          <p:cNvSpPr txBox="1"/>
+          <p:nvPr/>
+        </p:nvSpPr>
+        <p:spPr>
+          <a:xfrm>
+            <a:off x="-1" y="4794255"/>
+            <a:ext cx="5728447" cy="1869346"/>
+          </a:xfrm>
+          <a:prstGeom prst="rect">
+            <a:avLst/>
+          </a:prstGeom>
+          <a:noFill/>
+        </p:spPr>
+        <p:txBody>
+          <a:bodyPr wrap="square" rtlCol="0">
+            <a:spAutoFit/>
+          </a:bodyPr>
+          <a:lstStyle/>
+          <a:p>
+            <a:r>
+              <a:rPr lang="en-CH" sz="1400" b="1" dirty="0"/>
+              <a:t>Recent topics in system identification: learning models for decision and control </a:t>
+            </a:r>
+          </a:p>
+          <a:p>
+            <a:r>
+              <a:rPr lang="en-CH" sz="1400" b="1" dirty="0"/>
+              <a:t>- Special Issue from IFAC SYSID 2027</a:t>
+            </a:r>
+            <a:endParaRPr lang="en-CH" sz="1400" dirty="0"/>
+          </a:p>
+          <a:p>
+            <a:r>
+              <a:rPr lang="en-CH" sz="1400" dirty="0"/>
+              <a:t>Submission deadline: </a:t>
+            </a:r>
+            <a:r>
+              <a:rPr lang="en-CH" sz="1400" b="1" dirty="0"/>
+              <a:t>01 October 2026</a:t>
+            </a:r>
+            <a:endParaRPr lang="en-CH" sz="1400" dirty="0"/>
+          </a:p>
+          <a:p>
+            <a:r>
+              <a:rPr lang="en-CH" sz="1400" dirty="0"/>
+              <a:t>This special issue highlights leading papers from the IFAC SYSID 2027 Symposium</a:t>
+            </a:r>
+          </a:p>
+          <a:p>
+            <a:endParaRPr lang="en-CH" sz="1400" dirty="0"/>
+          </a:p>
+          <a:p>
+            <a:r>
+              <a:rPr lang="en-CH" sz="1400" dirty="0"/>
+              <a:t>Executive guest editor: </a:t>
+            </a:r>
+            <a:r>
+              <a:rPr lang="en-CH" sz="1400" b="1" dirty="0"/>
+              <a:t>Dario Piga</a:t>
+            </a:r>
+          </a:p>
+        </p:txBody>
+      </p:sp>
+      <p:pic>
+        <p:nvPicPr>
+          <p:cNvPr id="25" name="Picture 24">
+            <a:extLst>
+              <a:ext uri="{FF2B5EF4-FFF2-40B4-BE49-F238E27FC236}">
+                <a16:creationId xmlns:a16="http://schemas.microsoft.com/office/drawing/2014/main" id="{D4C418C2-CA5B-E8C6-90DF-CF84332A526E}"/>
+              </a:ext>
+            </a:extLst>
+          </p:cNvPr>
+          <p:cNvPicPr>
+            <a:picLocks noChangeAspect="1"/>
+          </p:cNvPicPr>
+          <p:nvPr/>
+        </p:nvPicPr>
+        <p:blipFill>
+          <a:blip r:embed="rId6"/>
+          <a:stretch>
+            <a:fillRect/>
+          </a:stretch>
+        </p:blipFill>
+        <p:spPr>
+          <a:xfrm>
+            <a:off x="5968053" y="4687754"/>
+            <a:ext cx="6136744" cy="1869346"/>
+          </a:xfrm>
+          <a:prstGeom prst="rect">
+            <a:avLst/>
+          </a:prstGeom>
+        </p:spPr>
+      </p:pic>
+      <p:sp>
+        <p:nvSpPr>
+          <p:cNvPr id="26" name="TextBox 25">
+            <a:extLst>
+              <a:ext uri="{FF2B5EF4-FFF2-40B4-BE49-F238E27FC236}">
+                <a16:creationId xmlns:a16="http://schemas.microsoft.com/office/drawing/2014/main" id="{A07B3EEB-7537-BE31-C845-48C4438C7870}"/>
+              </a:ext>
+            </a:extLst>
+          </p:cNvPr>
+          <p:cNvSpPr txBox="1"/>
+          <p:nvPr/>
+        </p:nvSpPr>
+        <p:spPr>
+          <a:xfrm>
+            <a:off x="3466599" y="2541621"/>
+            <a:ext cx="7037295" cy="1323439"/>
+          </a:xfrm>
+          <a:prstGeom prst="rect">
+            <a:avLst/>
+          </a:prstGeom>
+          <a:noFill/>
+        </p:spPr>
+        <p:txBody>
+          <a:bodyPr wrap="square" rtlCol="0">
+            <a:spAutoFit/>
+          </a:bodyPr>
+          <a:lstStyle/>
+          <a:p>
+            <a:pPr marL="285750" indent="-285750">
+              <a:buFont typeface="Arial" panose="020B0604020202020204" pitchFamily="34" charset="0"/>
+              <a:buChar char="•"/>
+            </a:pPr>
+            <a:r>
+              <a:rPr lang="en-GB" sz="2000" dirty="0"/>
+              <a:t>Submission site already open</a:t>
+            </a:r>
+          </a:p>
+          <a:p>
+            <a:pPr marL="285750" indent="-285750">
+              <a:buFont typeface="Arial" panose="020B0604020202020204" pitchFamily="34" charset="0"/>
+              <a:buChar char="•"/>
+            </a:pPr>
+            <a:r>
+              <a:rPr lang="en-GB" sz="2000" dirty="0"/>
+              <a:t>More info: </a:t>
+            </a:r>
+            <a:r>
+              <a:rPr lang="en-GB" sz="2000" dirty="0">
+                <a:hlinkClick r:id="rId7"/>
+              </a:rPr>
+              <a:t>https://conferences.ifac-control.org/sysid2027/</a:t>
+            </a:r>
+            <a:endParaRPr lang="en-GB" sz="2000" dirty="0"/>
+          </a:p>
+          <a:p>
+            <a:pPr marL="285750" indent="-285750">
+              <a:buFont typeface="Arial" panose="020B0604020202020204" pitchFamily="34" charset="0"/>
+              <a:buChar char="•"/>
+            </a:pPr>
+            <a:r>
+              <a:rPr lang="en-GB" sz="2000" dirty="0"/>
+              <a:t>… or just ask us!</a:t>
+            </a:r>
+            <a:endParaRPr lang="en-GB" sz="2000" dirty="0">
+              <a:hlinkClick r:id="rId7"/>
+            </a:endParaRPr>
+          </a:p>
+          <a:p>
+            <a:pPr marL="285750" indent="-285750">
+              <a:buFont typeface="Arial" panose="020B0604020202020204" pitchFamily="34" charset="0"/>
+              <a:buChar char="•"/>
+            </a:pPr>
+            <a:endParaRPr lang="en-CH" sz="2000" dirty="0"/>
+          </a:p>
+        </p:txBody>
+      </p:sp>
+    </p:spTree>
+    <p:extLst>
+      <p:ext uri="{BB962C8B-B14F-4D97-AF65-F5344CB8AC3E}">
+        <p14:creationId xmlns:p14="http://schemas.microsoft.com/office/powerpoint/2010/main" val="3315273391"/>
+      </p:ext>
+    </p:extLst>
+  </p:cSld>
+  <p:clrMapOvr>
+    <a:masterClrMapping/>
+  </p:clrMapOvr>
+  <p:timing>
+    <p:tnLst>
+      <p:par>
+        <p:cTn id="1" dur="indefinite" restart="never" nodeType="tmRoot">
+          <p:childTnLst>
+            <p:seq concurrent="1" nextAc="seek">
+              <p:cTn id="2" dur="indefinite" nodeType="mainSeq">
+                <p:childTnLst>
+                  <p:par>
+                    <p:cTn id="3" fill="hold">
+                      <p:stCondLst>
+                        <p:cond delay="indefinite"/>
+                      </p:stCondLst>
+                      <p:childTnLst>
+                        <p:par>
+                          <p:cTn id="4" fill="hold">
+                            <p:stCondLst>
+                              <p:cond delay="0"/>
+                            </p:stCondLst>
+                            <p:childTnLst>
+                              <p:par>
+                                <p:cTn id="5" presetID="1" presetClass="entr" presetSubtype="0" fill="hold" grpId="0" nodeType="clickEffect">
+                                  <p:stCondLst>
+                                    <p:cond delay="0"/>
+                                  </p:stCondLst>
+                                  <p:childTnLst>
+                                    <p:set>
+                                      <p:cBhvr>
+                                        <p:cTn id="6" dur="1" fill="hold">
+                                          <p:stCondLst>
+                                            <p:cond delay="0"/>
+                                          </p:stCondLst>
+                                        </p:cTn>
+                                        <p:tgtEl>
+                                          <p:spTgt spid="24"/>
+                                        </p:tgtEl>
+                                        <p:attrNameLst>
+                                          <p:attrName>style.visibility</p:attrName>
+                                        </p:attrNameLst>
+                                      </p:cBhvr>
+                                      <p:to>
+                                        <p:strVal val="visible"/>
+                                      </p:to>
+                                    </p:set>
+                                  </p:childTnLst>
+                                </p:cTn>
+                              </p:par>
+                              <p:par>
+                                <p:cTn id="7" presetID="1" presetClass="entr" presetSubtype="0" fill="hold" nodeType="withEffect">
+                                  <p:stCondLst>
+                                    <p:cond delay="0"/>
+                                  </p:stCondLst>
+                                  <p:childTnLst>
+                                    <p:set>
+                                      <p:cBhvr>
+                                        <p:cTn id="8" dur="1" fill="hold">
+                                          <p:stCondLst>
+                                            <p:cond delay="0"/>
+                                          </p:stCondLst>
+                                        </p:cTn>
+                                        <p:tgtEl>
+                                          <p:spTgt spid="25"/>
+                                        </p:tgtEl>
+                                        <p:attrNameLst>
+                                          <p:attrName>style.visibility</p:attrName>
+                                        </p:attrNameLst>
+                                      </p:cBhvr>
+                                      <p:to>
+                                        <p:strVal val="visible"/>
+                                      </p:to>
+                                    </p:set>
+                                  </p:childTnLst>
+                                </p:cTn>
+                              </p:par>
+                            </p:childTnLst>
+                          </p:cTn>
+                        </p:par>
+                      </p:childTnLst>
+                    </p:cTn>
+                  </p:par>
+                </p:childTnLst>
+              </p:cTn>
+              <p:prevCondLst>
+                <p:cond evt="onPrev" delay="0">
+                  <p:tgtEl>
+                    <p:sldTgt/>
+                  </p:tgtEl>
+                </p:cond>
+              </p:prevCondLst>
+              <p:nextCondLst>
+                <p:cond evt="onNext" delay="0">
+                  <p:tgtEl>
+                    <p:sldTgt/>
+                  </p:tgtEl>
+                </p:cond>
+              </p:nextCondLst>
+            </p:seq>
+          </p:childTnLst>
+        </p:cTn>
+      </p:par>
+    </p:tnLst>
+    <p:bldLst>
+      <p:bldP spid="24" grpId="0"/>
+    </p:bldLst>
+  </p:timing>
 </p:sld>
 </file>
 
@@ -5221,8 +6036,8 @@
           </a:p>
         </p:txBody>
       </p:sp>
-      <mc:AlternateContent xmlns:mc="http://schemas.openxmlformats.org/markup-compatibility/2006">
-        <mc:Choice xmlns:a14="http://schemas.microsoft.com/office/drawing/2010/main" Requires="a14">
+      <mc:AlternateContent xmlns:mc="http://schemas.openxmlformats.org/markup-compatibility/2006" xmlns:a14="http://schemas.microsoft.com/office/drawing/2010/main">
+        <mc:Choice Requires="a14">
           <p:sp>
             <p:nvSpPr>
               <p:cNvPr id="6" name="Content Placeholder 5">
@@ -5314,7 +6129,7 @@
             </p:txBody>
           </p:sp>
         </mc:Choice>
-        <mc:Fallback>
+        <mc:Fallback xmlns="">
           <p:sp>
             <p:nvSpPr>
               <p:cNvPr id="6" name="Content Placeholder 5">
@@ -9948,19 +10763,21 @@
 
 <file path=ppt/tags/tag32.xml><?xml version="1.0" encoding="utf-8"?>
 <p:tagLst xmlns:a="http://schemas.openxmlformats.org/drawingml/2006/main" xmlns:r="http://schemas.openxmlformats.org/officeDocument/2006/relationships" xmlns:p="http://schemas.openxmlformats.org/presentationml/2006/main">
-  <p:tag name="OUTPUTDPI" val="1200"/>
-  <p:tag name="ORIGINALHEIGHT" val="26"/>
-  <p:tag name="ORIGINALWIDTH" val="140"/>
-  <p:tag name="OUTPUTTYPE" val="PDF"/>
-  <p:tag name="IGUANATEXVERSION" val="160"/>
-  <p:tag name="LATEXADDIN" val="\documentclass{article}&#10;\usepackage{amsmath}&#10;\usepackage{amsfonts}&#10;\usepackage{color}&#10;\newcommand{\red}[1]{{\color{red}#1}}&#10;&#10;\pagestyle{empty}&#10;&#10;\begin{document}&#10;&#10;\begin{align*}&#10;\theta &amp;= \mathrm{Alg}_\theta(D) = \phi - \alpha \nabla_\theta \mathcal{L}(\theta, D), \\&#10;\hat y &amp;= \mathrm{MLP}_\phi(x).&#10;\end{align*}&#10;&#10;\end{document}"/>
+  <p:tag name="OUTPUTDPI" val=" 1200"/>
+  <p:tag name="ORIGINALHEIGHT" val=" 327"/>
+  <p:tag name="ORIGINALWIDTH" val=" 1776"/>
+  <p:tag name="OUTPUTTYPE" val="PNG"/>
+  <p:tag name="IGUANATEXVERSION" val="162"/>
+  <p:tag name="LATEXADDIN" val="\documentclass{article}&#10;\usepackage{amsmath}&#10;\usepackage{amsfonts}&#10;\usepackage{color}&#10;\newcommand{\red}[1]{{\color{red}#1}}&#10;&#10;\pagestyle{empty}&#10;&#10;\begin{document}&#10;&#10;\begin{align*}&#10;\theta &amp;= \mathrm{Alg}_\phi(D) = \phi - \alpha \nabla_\phi \mathcal{L}(\phi, D), \\&#10;\hat y &amp;= \mathrm{MLP}_\theta(x).&#10;\end{align*}&#10;&#10;\end{document}"/>
   <p:tag name="IGUANATEXSIZE" val="18"/>
-  <p:tag name="IGUANATEXCURSOR" val="216"/>
+  <p:tag name="IGUANATEXCURSOR" val="252"/>
   <p:tag name="TRANSPARENCY" val="True"/>
+  <p:tag name="CHOOSECOLOR" val="False"/>
+  <p:tag name="COLORHEX" val="000000"/>
   <p:tag name="LATEXENGINEID" val="0"/>
   <p:tag name="TEMPFOLDER" val="/Users/marco.forgione/Library/Containers/com.microsoft.Powerpoint/Data/tmp/TemporaryItems/"/>
-  <p:tag name="LATEXFORMHEIGHT" val="426.65"/>
-  <p:tag name="LATEXFORMWIDTH" val="513.35"/>
+  <p:tag name="LATEXFORMHEIGHT" val=" 426.65"/>
+  <p:tag name="LATEXFORMWIDTH" val=" 513.35"/>
   <p:tag name="LATEXFORMWRAP" val="True"/>
   <p:tag name="BITMAPVECTOR" val="0"/>
 </p:tagLst>
@@ -11526,17 +12343,6 @@
 </file>
 
 <file path=customXml/item1.xml><?xml version="1.0" encoding="utf-8"?>
-<p:properties xmlns:p="http://schemas.microsoft.com/office/2006/metadata/properties" xmlns:xsi="http://www.w3.org/2001/XMLSchema-instance" xmlns:pc="http://schemas.microsoft.com/office/infopath/2007/PartnerControls">
-  <documentManagement>
-    <lcf76f155ced4ddcb4097134ff3c332f xmlns="0c05fedb-ed2a-4eb3-93de-5f5a6c97bfe0">
-      <Terms xmlns="http://schemas.microsoft.com/office/infopath/2007/PartnerControls"/>
-    </lcf76f155ced4ddcb4097134ff3c332f>
-    <TaxCatchAll xmlns="c69d801c-64cd-49bc-b1b3-ec2496ede094" xsi:nil="true"/>
-  </documentManagement>
-</p:properties>
-</file>
-
-<file path=customXml/item2.xml><?xml version="1.0" encoding="utf-8"?>
 <?mso-contentType ?>
 <FormTemplates xmlns="http://schemas.microsoft.com/sharepoint/v3/contenttype/forms">
   <Display>DocumentLibraryForm</Display>
@@ -11545,7 +12351,7 @@
 </FormTemplates>
 </file>
 
-<file path=customXml/item3.xml><?xml version="1.0" encoding="utf-8"?>
+<file path=customXml/item2.xml><?xml version="1.0" encoding="utf-8"?>
 <ct:contentTypeSchema xmlns:ct="http://schemas.microsoft.com/office/2006/metadata/contentType" xmlns:ma="http://schemas.microsoft.com/office/2006/metadata/properties/metaAttributes" ct:_="" ma:_="" ma:contentTypeName="Document" ma:contentTypeID="0x010100E943B4D0C91CA54E9BBFAD215D4A4FF7" ma:contentTypeVersion="18" ma:contentTypeDescription="Create a new document." ma:contentTypeScope="" ma:versionID="48c4930ddcec7bff74490998dd84a4c1">
   <xsd:schema xmlns:xsd="http://www.w3.org/2001/XMLSchema" xmlns:xs="http://www.w3.org/2001/XMLSchema" xmlns:p="http://schemas.microsoft.com/office/2006/metadata/properties" xmlns:ns2="0c05fedb-ed2a-4eb3-93de-5f5a6c97bfe0" xmlns:ns3="c69d801c-64cd-49bc-b1b3-ec2496ede094" targetNamespace="http://schemas.microsoft.com/office/2006/metadata/properties" ma:root="true" ma:fieldsID="dcb337392c8a5973c5e221652a72fbb4" ns2:_="" ns3:_="">
     <xsd:import namespace="0c05fedb-ed2a-4eb3-93de-5f5a6c97bfe0"/>
@@ -11800,24 +12606,18 @@
 </ct:contentTypeSchema>
 </file>
 
-<file path=customXml/itemProps1.xml><?xml version="1.0" encoding="utf-8"?>
-<ds:datastoreItem xmlns:ds="http://schemas.openxmlformats.org/officeDocument/2006/customXml" ds:itemID="{862A9E72-43F2-4CCE-8F90-EBA4919DBB42}">
-  <ds:schemaRefs>
-    <ds:schemaRef ds:uri="http://schemas.microsoft.com/office/2006/documentManagement/types"/>
-    <ds:schemaRef ds:uri="c69d801c-64cd-49bc-b1b3-ec2496ede094"/>
-    <ds:schemaRef ds:uri="http://purl.org/dc/dcmitype/"/>
-    <ds:schemaRef ds:uri="http://purl.org/dc/elements/1.1/"/>
-    <ds:schemaRef ds:uri="http://schemas.openxmlformats.org/package/2006/metadata/core-properties"/>
-    <ds:schemaRef ds:uri="http://purl.org/dc/terms/"/>
-    <ds:schemaRef ds:uri="http://www.w3.org/XML/1998/namespace"/>
-    <ds:schemaRef ds:uri="http://schemas.microsoft.com/office/infopath/2007/PartnerControls"/>
-    <ds:schemaRef ds:uri="0c05fedb-ed2a-4eb3-93de-5f5a6c97bfe0"/>
-    <ds:schemaRef ds:uri="http://schemas.microsoft.com/office/2006/metadata/properties"/>
-  </ds:schemaRefs>
-</ds:datastoreItem>
+<file path=customXml/item3.xml><?xml version="1.0" encoding="utf-8"?>
+<p:properties xmlns:p="http://schemas.microsoft.com/office/2006/metadata/properties" xmlns:xsi="http://www.w3.org/2001/XMLSchema-instance" xmlns:pc="http://schemas.microsoft.com/office/infopath/2007/PartnerControls">
+  <documentManagement>
+    <lcf76f155ced4ddcb4097134ff3c332f xmlns="0c05fedb-ed2a-4eb3-93de-5f5a6c97bfe0">
+      <Terms xmlns="http://schemas.microsoft.com/office/infopath/2007/PartnerControls"/>
+    </lcf76f155ced4ddcb4097134ff3c332f>
+    <TaxCatchAll xmlns="c69d801c-64cd-49bc-b1b3-ec2496ede094" xsi:nil="true"/>
+  </documentManagement>
+</p:properties>
 </file>
 
-<file path=customXml/itemProps2.xml><?xml version="1.0" encoding="utf-8"?>
+<file path=customXml/itemProps1.xml><?xml version="1.0" encoding="utf-8"?>
 <ds:datastoreItem xmlns:ds="http://schemas.openxmlformats.org/officeDocument/2006/customXml" ds:itemID="{957E0BBE-38AF-4179-B401-F6E82B6A5F3D}">
   <ds:schemaRefs>
     <ds:schemaRef ds:uri="http://schemas.microsoft.com/sharepoint/v3/contenttype/forms"/>
@@ -11825,7 +12625,7 @@
 </ds:datastoreItem>
 </file>
 
-<file path=customXml/itemProps3.xml><?xml version="1.0" encoding="utf-8"?>
+<file path=customXml/itemProps2.xml><?xml version="1.0" encoding="utf-8"?>
 <ds:datastoreItem xmlns:ds="http://schemas.openxmlformats.org/officeDocument/2006/customXml" ds:itemID="{950C4CF8-8E6C-4481-8DE0-79509E1800D4}">
   <ds:schemaRefs>
     <ds:schemaRef ds:uri="http://schemas.microsoft.com/office/2006/metadata/contentType"/>
@@ -11842,4 +12642,21 @@
     <ds:schemaRef ds:uri="http://schemas.microsoft.com/internal/obd"/>
   </ds:schemaRefs>
 </ds:datastoreItem>
+</file>
+
+<file path=customXml/itemProps3.xml><?xml version="1.0" encoding="utf-8"?>
+<ds:datastoreItem xmlns:ds="http://schemas.openxmlformats.org/officeDocument/2006/customXml" ds:itemID="{862A9E72-43F2-4CCE-8F90-EBA4919DBB42}">
+  <ds:schemaRefs>
+    <ds:schemaRef ds:uri="http://schemas.microsoft.com/office/2006/documentManagement/types"/>
+    <ds:schemaRef ds:uri="c69d801c-64cd-49bc-b1b3-ec2496ede094"/>
+    <ds:schemaRef ds:uri="http://purl.org/dc/dcmitype/"/>
+    <ds:schemaRef ds:uri="http://purl.org/dc/elements/1.1/"/>
+    <ds:schemaRef ds:uri="http://schemas.openxmlformats.org/package/2006/metadata/core-properties"/>
+    <ds:schemaRef ds:uri="http://purl.org/dc/terms/"/>
+    <ds:schemaRef ds:uri="http://www.w3.org/XML/1998/namespace"/>
+    <ds:schemaRef ds:uri="http://schemas.microsoft.com/office/infopath/2007/PartnerControls"/>
+    <ds:schemaRef ds:uri="0c05fedb-ed2a-4eb3-93de-5f5a6c97bfe0"/>
+    <ds:schemaRef ds:uri="http://schemas.microsoft.com/office/2006/metadata/properties"/>
+  </ds:schemaRefs>
+</ds:datastoreItem>
 </file>